--- a/assets/template-pptx.pptx
+++ b/assets/template-pptx.pptx
@@ -5813,7 +5813,7 @@
       </p:sp>
       <p:graphicFrame xmlns:a="http://schemas.openxmlformats.org/drawingml/2006/main" xmlns:r="http://schemas.openxmlformats.org/officeDocument/2006/relationships" xmlns:p="http://schemas.openxmlformats.org/presentationml/2006/main">
         <p:nvGraphicFramePr>
-          <p:cNvPr id="783777952" name=""/>
+          <p:cNvPr id="36141160" name=""/>
           <p:cNvGraphicFramePr>
             <a:graphicFrameLocks noGrp="true"/>
           </p:cNvGraphicFramePr>

--- a/assets/template-pptx.pptx
+++ b/assets/template-pptx.pptx
@@ -5813,7 +5813,7 @@
       </p:sp>
       <p:graphicFrame xmlns:a="http://schemas.openxmlformats.org/drawingml/2006/main" xmlns:r="http://schemas.openxmlformats.org/officeDocument/2006/relationships" xmlns:p="http://schemas.openxmlformats.org/presentationml/2006/main">
         <p:nvGraphicFramePr>
-          <p:cNvPr id="36141160" name=""/>
+          <p:cNvPr id="46267174" name=""/>
           <p:cNvGraphicFramePr>
             <a:graphicFrameLocks noGrp="true"/>
           </p:cNvGraphicFramePr>

--- a/assets/template-pptx.pptx
+++ b/assets/template-pptx.pptx
@@ -5813,7 +5813,7 @@
       </p:sp>
       <p:graphicFrame xmlns:a="http://schemas.openxmlformats.org/drawingml/2006/main" xmlns:r="http://schemas.openxmlformats.org/officeDocument/2006/relationships" xmlns:p="http://schemas.openxmlformats.org/presentationml/2006/main">
         <p:nvGraphicFramePr>
-          <p:cNvPr id="46267174" name=""/>
+          <p:cNvPr id="429428010" name=""/>
           <p:cNvGraphicFramePr>
             <a:graphicFrameLocks noGrp="true"/>
           </p:cNvGraphicFramePr>
@@ -5861,10 +5861,10 @@
                               <a:alpha val="100000"/>
                             </a:srgbClr>
                           </a:solidFill>
-                          <a:latin typeface="DejaVu Sans"/>
-                          <a:cs typeface="DejaVu Sans"/>
-                          <a:ea typeface="DejaVu Sans"/>
-                          <a:sym typeface="DejaVu Sans"/>
+                          <a:latin typeface="Proxima Nova"/>
+                          <a:cs typeface="Proxima Nova"/>
+                          <a:ea typeface="Proxima Nova"/>
+                          <a:sym typeface="Proxima Nova"/>
                         </a:rPr>
                         <a:t>Ozone</a:t>
                       </a:r>
@@ -5934,10 +5934,10 @@
                               <a:alpha val="100000"/>
                             </a:srgbClr>
                           </a:solidFill>
-                          <a:latin typeface="DejaVu Sans"/>
-                          <a:cs typeface="DejaVu Sans"/>
-                          <a:ea typeface="DejaVu Sans"/>
-                          <a:sym typeface="DejaVu Sans"/>
+                          <a:latin typeface="Proxima Nova"/>
+                          <a:cs typeface="Proxima Nova"/>
+                          <a:ea typeface="Proxima Nova"/>
+                          <a:sym typeface="Proxima Nova"/>
                         </a:rPr>
                         <a:t>Solar.R</a:t>
                       </a:r>
@@ -6007,10 +6007,10 @@
                               <a:alpha val="100000"/>
                             </a:srgbClr>
                           </a:solidFill>
-                          <a:latin typeface="DejaVu Sans"/>
-                          <a:cs typeface="DejaVu Sans"/>
-                          <a:ea typeface="DejaVu Sans"/>
-                          <a:sym typeface="DejaVu Sans"/>
+                          <a:latin typeface="Proxima Nova"/>
+                          <a:cs typeface="Proxima Nova"/>
+                          <a:ea typeface="Proxima Nova"/>
+                          <a:sym typeface="Proxima Nova"/>
                         </a:rPr>
                         <a:t>Wind</a:t>
                       </a:r>
@@ -6080,10 +6080,10 @@
                               <a:alpha val="100000"/>
                             </a:srgbClr>
                           </a:solidFill>
-                          <a:latin typeface="DejaVu Sans"/>
-                          <a:cs typeface="DejaVu Sans"/>
-                          <a:ea typeface="DejaVu Sans"/>
-                          <a:sym typeface="DejaVu Sans"/>
+                          <a:latin typeface="Proxima Nova"/>
+                          <a:cs typeface="Proxima Nova"/>
+                          <a:ea typeface="Proxima Nova"/>
+                          <a:sym typeface="Proxima Nova"/>
                         </a:rPr>
                         <a:t>Temp</a:t>
                       </a:r>
@@ -6153,10 +6153,10 @@
                               <a:alpha val="100000"/>
                             </a:srgbClr>
                           </a:solidFill>
-                          <a:latin typeface="DejaVu Sans"/>
-                          <a:cs typeface="DejaVu Sans"/>
-                          <a:ea typeface="DejaVu Sans"/>
-                          <a:sym typeface="DejaVu Sans"/>
+                          <a:latin typeface="Proxima Nova"/>
+                          <a:cs typeface="Proxima Nova"/>
+                          <a:ea typeface="Proxima Nova"/>
+                          <a:sym typeface="Proxima Nova"/>
                         </a:rPr>
                         <a:t>Month</a:t>
                       </a:r>
@@ -6226,10 +6226,10 @@
                               <a:alpha val="100000"/>
                             </a:srgbClr>
                           </a:solidFill>
-                          <a:latin typeface="DejaVu Sans"/>
-                          <a:cs typeface="DejaVu Sans"/>
-                          <a:ea typeface="DejaVu Sans"/>
-                          <a:sym typeface="DejaVu Sans"/>
+                          <a:latin typeface="Proxima Nova"/>
+                          <a:cs typeface="Proxima Nova"/>
+                          <a:ea typeface="Proxima Nova"/>
+                          <a:sym typeface="Proxima Nova"/>
                         </a:rPr>
                         <a:t>Day</a:t>
                       </a:r>
@@ -6299,10 +6299,10 @@
                               <a:alpha val="100000"/>
                             </a:srgbClr>
                           </a:solidFill>
-                          <a:latin typeface="DejaVu Sans"/>
-                          <a:cs typeface="DejaVu Sans"/>
-                          <a:ea typeface="DejaVu Sans"/>
-                          <a:sym typeface="DejaVu Sans"/>
+                          <a:latin typeface="Proxima Nova"/>
+                          <a:cs typeface="Proxima Nova"/>
+                          <a:ea typeface="Proxima Nova"/>
+                          <a:sym typeface="Proxima Nova"/>
                         </a:rPr>
                         <a:t>Month Name</a:t>
                       </a:r>
@@ -6374,10 +6374,10 @@
                               <a:alpha val="100000"/>
                             </a:srgbClr>
                           </a:solidFill>
-                          <a:latin typeface="DejaVu Sans"/>
-                          <a:cs typeface="DejaVu Sans"/>
-                          <a:ea typeface="DejaVu Sans"/>
-                          <a:sym typeface="DejaVu Sans"/>
+                          <a:latin typeface="Proxima Nova"/>
+                          <a:cs typeface="Proxima Nova"/>
+                          <a:ea typeface="Proxima Nova"/>
+                          <a:sym typeface="Proxima Nova"/>
                         </a:rPr>
                         <a:t>41</a:t>
                       </a:r>
@@ -6447,10 +6447,10 @@
                               <a:alpha val="100000"/>
                             </a:srgbClr>
                           </a:solidFill>
-                          <a:latin typeface="DejaVu Sans"/>
-                          <a:cs typeface="DejaVu Sans"/>
-                          <a:ea typeface="DejaVu Sans"/>
-                          <a:sym typeface="DejaVu Sans"/>
+                          <a:latin typeface="Proxima Nova"/>
+                          <a:cs typeface="Proxima Nova"/>
+                          <a:ea typeface="Proxima Nova"/>
+                          <a:sym typeface="Proxima Nova"/>
                         </a:rPr>
                         <a:t>190</a:t>
                       </a:r>
@@ -6520,10 +6520,10 @@
                               <a:alpha val="100000"/>
                             </a:srgbClr>
                           </a:solidFill>
-                          <a:latin typeface="DejaVu Sans"/>
-                          <a:cs typeface="DejaVu Sans"/>
-                          <a:ea typeface="DejaVu Sans"/>
-                          <a:sym typeface="DejaVu Sans"/>
+                          <a:latin typeface="Proxima Nova"/>
+                          <a:cs typeface="Proxima Nova"/>
+                          <a:ea typeface="Proxima Nova"/>
+                          <a:sym typeface="Proxima Nova"/>
                         </a:rPr>
                         <a:t>7.4</a:t>
                       </a:r>
@@ -6593,10 +6593,10 @@
                               <a:alpha val="100000"/>
                             </a:srgbClr>
                           </a:solidFill>
-                          <a:latin typeface="DejaVu Sans"/>
-                          <a:cs typeface="DejaVu Sans"/>
-                          <a:ea typeface="DejaVu Sans"/>
-                          <a:sym typeface="DejaVu Sans"/>
+                          <a:latin typeface="Proxima Nova"/>
+                          <a:cs typeface="Proxima Nova"/>
+                          <a:ea typeface="Proxima Nova"/>
+                          <a:sym typeface="Proxima Nova"/>
                         </a:rPr>
                         <a:t>67</a:t>
                       </a:r>
@@ -6666,10 +6666,10 @@
                               <a:alpha val="100000"/>
                             </a:srgbClr>
                           </a:solidFill>
-                          <a:latin typeface="DejaVu Sans"/>
-                          <a:cs typeface="DejaVu Sans"/>
-                          <a:ea typeface="DejaVu Sans"/>
-                          <a:sym typeface="DejaVu Sans"/>
+                          <a:latin typeface="Proxima Nova"/>
+                          <a:cs typeface="Proxima Nova"/>
+                          <a:ea typeface="Proxima Nova"/>
+                          <a:sym typeface="Proxima Nova"/>
                         </a:rPr>
                         <a:t>5</a:t>
                       </a:r>
@@ -6739,10 +6739,10 @@
                               <a:alpha val="100000"/>
                             </a:srgbClr>
                           </a:solidFill>
-                          <a:latin typeface="DejaVu Sans"/>
-                          <a:cs typeface="DejaVu Sans"/>
-                          <a:ea typeface="DejaVu Sans"/>
-                          <a:sym typeface="DejaVu Sans"/>
+                          <a:latin typeface="Proxima Nova"/>
+                          <a:cs typeface="Proxima Nova"/>
+                          <a:ea typeface="Proxima Nova"/>
+                          <a:sym typeface="Proxima Nova"/>
                         </a:rPr>
                         <a:t>1</a:t>
                       </a:r>
@@ -6812,10 +6812,10 @@
                               <a:alpha val="100000"/>
                             </a:srgbClr>
                           </a:solidFill>
-                          <a:latin typeface="DejaVu Sans"/>
-                          <a:cs typeface="DejaVu Sans"/>
-                          <a:ea typeface="DejaVu Sans"/>
-                          <a:sym typeface="DejaVu Sans"/>
+                          <a:latin typeface="Proxima Nova"/>
+                          <a:cs typeface="Proxima Nova"/>
+                          <a:ea typeface="Proxima Nova"/>
+                          <a:sym typeface="Proxima Nova"/>
                         </a:rPr>
                         <a:t>May</a:t>
                       </a:r>
@@ -6887,10 +6887,10 @@
                               <a:alpha val="100000"/>
                             </a:srgbClr>
                           </a:solidFill>
-                          <a:latin typeface="DejaVu Sans"/>
-                          <a:cs typeface="DejaVu Sans"/>
-                          <a:ea typeface="DejaVu Sans"/>
-                          <a:sym typeface="DejaVu Sans"/>
+                          <a:latin typeface="Proxima Nova"/>
+                          <a:cs typeface="Proxima Nova"/>
+                          <a:ea typeface="Proxima Nova"/>
+                          <a:sym typeface="Proxima Nova"/>
                         </a:rPr>
                         <a:t>36</a:t>
                       </a:r>
@@ -6960,10 +6960,10 @@
                               <a:alpha val="100000"/>
                             </a:srgbClr>
                           </a:solidFill>
-                          <a:latin typeface="DejaVu Sans"/>
-                          <a:cs typeface="DejaVu Sans"/>
-                          <a:ea typeface="DejaVu Sans"/>
-                          <a:sym typeface="DejaVu Sans"/>
+                          <a:latin typeface="Proxima Nova"/>
+                          <a:cs typeface="Proxima Nova"/>
+                          <a:ea typeface="Proxima Nova"/>
+                          <a:sym typeface="Proxima Nova"/>
                         </a:rPr>
                         <a:t>118</a:t>
                       </a:r>
@@ -7033,10 +7033,10 @@
                               <a:alpha val="100000"/>
                             </a:srgbClr>
                           </a:solidFill>
-                          <a:latin typeface="DejaVu Sans"/>
-                          <a:cs typeface="DejaVu Sans"/>
-                          <a:ea typeface="DejaVu Sans"/>
-                          <a:sym typeface="DejaVu Sans"/>
+                          <a:latin typeface="Proxima Nova"/>
+                          <a:cs typeface="Proxima Nova"/>
+                          <a:ea typeface="Proxima Nova"/>
+                          <a:sym typeface="Proxima Nova"/>
                         </a:rPr>
                         <a:t>8.0</a:t>
                       </a:r>
@@ -7106,10 +7106,10 @@
                               <a:alpha val="100000"/>
                             </a:srgbClr>
                           </a:solidFill>
-                          <a:latin typeface="DejaVu Sans"/>
-                          <a:cs typeface="DejaVu Sans"/>
-                          <a:ea typeface="DejaVu Sans"/>
-                          <a:sym typeface="DejaVu Sans"/>
+                          <a:latin typeface="Proxima Nova"/>
+                          <a:cs typeface="Proxima Nova"/>
+                          <a:ea typeface="Proxima Nova"/>
+                          <a:sym typeface="Proxima Nova"/>
                         </a:rPr>
                         <a:t>72</a:t>
                       </a:r>
@@ -7179,10 +7179,10 @@
                               <a:alpha val="100000"/>
                             </a:srgbClr>
                           </a:solidFill>
-                          <a:latin typeface="DejaVu Sans"/>
-                          <a:cs typeface="DejaVu Sans"/>
-                          <a:ea typeface="DejaVu Sans"/>
-                          <a:sym typeface="DejaVu Sans"/>
+                          <a:latin typeface="Proxima Nova"/>
+                          <a:cs typeface="Proxima Nova"/>
+                          <a:ea typeface="Proxima Nova"/>
+                          <a:sym typeface="Proxima Nova"/>
                         </a:rPr>
                         <a:t>5</a:t>
                       </a:r>
@@ -7252,10 +7252,10 @@
                               <a:alpha val="100000"/>
                             </a:srgbClr>
                           </a:solidFill>
-                          <a:latin typeface="DejaVu Sans"/>
-                          <a:cs typeface="DejaVu Sans"/>
-                          <a:ea typeface="DejaVu Sans"/>
-                          <a:sym typeface="DejaVu Sans"/>
+                          <a:latin typeface="Proxima Nova"/>
+                          <a:cs typeface="Proxima Nova"/>
+                          <a:ea typeface="Proxima Nova"/>
+                          <a:sym typeface="Proxima Nova"/>
                         </a:rPr>
                         <a:t>2</a:t>
                       </a:r>
@@ -7325,10 +7325,10 @@
                               <a:alpha val="100000"/>
                             </a:srgbClr>
                           </a:solidFill>
-                          <a:latin typeface="DejaVu Sans"/>
-                          <a:cs typeface="DejaVu Sans"/>
-                          <a:ea typeface="DejaVu Sans"/>
-                          <a:sym typeface="DejaVu Sans"/>
+                          <a:latin typeface="Proxima Nova"/>
+                          <a:cs typeface="Proxima Nova"/>
+                          <a:ea typeface="Proxima Nova"/>
+                          <a:sym typeface="Proxima Nova"/>
                         </a:rPr>
                         <a:t>May</a:t>
                       </a:r>
@@ -7400,10 +7400,10 @@
                               <a:alpha val="100000"/>
                             </a:srgbClr>
                           </a:solidFill>
-                          <a:latin typeface="DejaVu Sans"/>
-                          <a:cs typeface="DejaVu Sans"/>
-                          <a:ea typeface="DejaVu Sans"/>
-                          <a:sym typeface="DejaVu Sans"/>
+                          <a:latin typeface="Proxima Nova"/>
+                          <a:cs typeface="Proxima Nova"/>
+                          <a:ea typeface="Proxima Nova"/>
+                          <a:sym typeface="Proxima Nova"/>
                         </a:rPr>
                         <a:t>12</a:t>
                       </a:r>
@@ -7473,10 +7473,10 @@
                               <a:alpha val="100000"/>
                             </a:srgbClr>
                           </a:solidFill>
-                          <a:latin typeface="DejaVu Sans"/>
-                          <a:cs typeface="DejaVu Sans"/>
-                          <a:ea typeface="DejaVu Sans"/>
-                          <a:sym typeface="DejaVu Sans"/>
+                          <a:latin typeface="Proxima Nova"/>
+                          <a:cs typeface="Proxima Nova"/>
+                          <a:ea typeface="Proxima Nova"/>
+                          <a:sym typeface="Proxima Nova"/>
                         </a:rPr>
                         <a:t>149</a:t>
                       </a:r>
@@ -7546,10 +7546,10 @@
                               <a:alpha val="100000"/>
                             </a:srgbClr>
                           </a:solidFill>
-                          <a:latin typeface="DejaVu Sans"/>
-                          <a:cs typeface="DejaVu Sans"/>
-                          <a:ea typeface="DejaVu Sans"/>
-                          <a:sym typeface="DejaVu Sans"/>
+                          <a:latin typeface="Proxima Nova"/>
+                          <a:cs typeface="Proxima Nova"/>
+                          <a:ea typeface="Proxima Nova"/>
+                          <a:sym typeface="Proxima Nova"/>
                         </a:rPr>
                         <a:t>12.6</a:t>
                       </a:r>
@@ -7619,10 +7619,10 @@
                               <a:alpha val="100000"/>
                             </a:srgbClr>
                           </a:solidFill>
-                          <a:latin typeface="DejaVu Sans"/>
-                          <a:cs typeface="DejaVu Sans"/>
-                          <a:ea typeface="DejaVu Sans"/>
-                          <a:sym typeface="DejaVu Sans"/>
+                          <a:latin typeface="Proxima Nova"/>
+                          <a:cs typeface="Proxima Nova"/>
+                          <a:ea typeface="Proxima Nova"/>
+                          <a:sym typeface="Proxima Nova"/>
                         </a:rPr>
                         <a:t>74</a:t>
                       </a:r>
@@ -7692,10 +7692,10 @@
                               <a:alpha val="100000"/>
                             </a:srgbClr>
                           </a:solidFill>
-                          <a:latin typeface="DejaVu Sans"/>
-                          <a:cs typeface="DejaVu Sans"/>
-                          <a:ea typeface="DejaVu Sans"/>
-                          <a:sym typeface="DejaVu Sans"/>
+                          <a:latin typeface="Proxima Nova"/>
+                          <a:cs typeface="Proxima Nova"/>
+                          <a:ea typeface="Proxima Nova"/>
+                          <a:sym typeface="Proxima Nova"/>
                         </a:rPr>
                         <a:t>5</a:t>
                       </a:r>
@@ -7765,10 +7765,10 @@
                               <a:alpha val="100000"/>
                             </a:srgbClr>
                           </a:solidFill>
-                          <a:latin typeface="DejaVu Sans"/>
-                          <a:cs typeface="DejaVu Sans"/>
-                          <a:ea typeface="DejaVu Sans"/>
-                          <a:sym typeface="DejaVu Sans"/>
+                          <a:latin typeface="Proxima Nova"/>
+                          <a:cs typeface="Proxima Nova"/>
+                          <a:ea typeface="Proxima Nova"/>
+                          <a:sym typeface="Proxima Nova"/>
                         </a:rPr>
                         <a:t>3</a:t>
                       </a:r>
@@ -7838,10 +7838,10 @@
                               <a:alpha val="100000"/>
                             </a:srgbClr>
                           </a:solidFill>
-                          <a:latin typeface="DejaVu Sans"/>
-                          <a:cs typeface="DejaVu Sans"/>
-                          <a:ea typeface="DejaVu Sans"/>
-                          <a:sym typeface="DejaVu Sans"/>
+                          <a:latin typeface="Proxima Nova"/>
+                          <a:cs typeface="Proxima Nova"/>
+                          <a:ea typeface="Proxima Nova"/>
+                          <a:sym typeface="Proxima Nova"/>
                         </a:rPr>
                         <a:t>May</a:t>
                       </a:r>
@@ -7913,10 +7913,10 @@
                               <a:alpha val="100000"/>
                             </a:srgbClr>
                           </a:solidFill>
-                          <a:latin typeface="DejaVu Sans"/>
-                          <a:cs typeface="DejaVu Sans"/>
-                          <a:ea typeface="DejaVu Sans"/>
-                          <a:sym typeface="DejaVu Sans"/>
+                          <a:latin typeface="Proxima Nova"/>
+                          <a:cs typeface="Proxima Nova"/>
+                          <a:ea typeface="Proxima Nova"/>
+                          <a:sym typeface="Proxima Nova"/>
                         </a:rPr>
                         <a:t>18</a:t>
                       </a:r>
@@ -7986,10 +7986,10 @@
                               <a:alpha val="100000"/>
                             </a:srgbClr>
                           </a:solidFill>
-                          <a:latin typeface="DejaVu Sans"/>
-                          <a:cs typeface="DejaVu Sans"/>
-                          <a:ea typeface="DejaVu Sans"/>
-                          <a:sym typeface="DejaVu Sans"/>
+                          <a:latin typeface="Proxima Nova"/>
+                          <a:cs typeface="Proxima Nova"/>
+                          <a:ea typeface="Proxima Nova"/>
+                          <a:sym typeface="Proxima Nova"/>
                         </a:rPr>
                         <a:t>313</a:t>
                       </a:r>
@@ -8059,10 +8059,10 @@
                               <a:alpha val="100000"/>
                             </a:srgbClr>
                           </a:solidFill>
-                          <a:latin typeface="DejaVu Sans"/>
-                          <a:cs typeface="DejaVu Sans"/>
-                          <a:ea typeface="DejaVu Sans"/>
-                          <a:sym typeface="DejaVu Sans"/>
+                          <a:latin typeface="Proxima Nova"/>
+                          <a:cs typeface="Proxima Nova"/>
+                          <a:ea typeface="Proxima Nova"/>
+                          <a:sym typeface="Proxima Nova"/>
                         </a:rPr>
                         <a:t>11.5</a:t>
                       </a:r>
@@ -8132,10 +8132,10 @@
                               <a:alpha val="100000"/>
                             </a:srgbClr>
                           </a:solidFill>
-                          <a:latin typeface="DejaVu Sans"/>
-                          <a:cs typeface="DejaVu Sans"/>
-                          <a:ea typeface="DejaVu Sans"/>
-                          <a:sym typeface="DejaVu Sans"/>
+                          <a:latin typeface="Proxima Nova"/>
+                          <a:cs typeface="Proxima Nova"/>
+                          <a:ea typeface="Proxima Nova"/>
+                          <a:sym typeface="Proxima Nova"/>
                         </a:rPr>
                         <a:t>62</a:t>
                       </a:r>
@@ -8205,10 +8205,10 @@
                               <a:alpha val="100000"/>
                             </a:srgbClr>
                           </a:solidFill>
-                          <a:latin typeface="DejaVu Sans"/>
-                          <a:cs typeface="DejaVu Sans"/>
-                          <a:ea typeface="DejaVu Sans"/>
-                          <a:sym typeface="DejaVu Sans"/>
+                          <a:latin typeface="Proxima Nova"/>
+                          <a:cs typeface="Proxima Nova"/>
+                          <a:ea typeface="Proxima Nova"/>
+                          <a:sym typeface="Proxima Nova"/>
                         </a:rPr>
                         <a:t>5</a:t>
                       </a:r>
@@ -8278,10 +8278,10 @@
                               <a:alpha val="100000"/>
                             </a:srgbClr>
                           </a:solidFill>
-                          <a:latin typeface="DejaVu Sans"/>
-                          <a:cs typeface="DejaVu Sans"/>
-                          <a:ea typeface="DejaVu Sans"/>
-                          <a:sym typeface="DejaVu Sans"/>
+                          <a:latin typeface="Proxima Nova"/>
+                          <a:cs typeface="Proxima Nova"/>
+                          <a:ea typeface="Proxima Nova"/>
+                          <a:sym typeface="Proxima Nova"/>
                         </a:rPr>
                         <a:t>4</a:t>
                       </a:r>
@@ -8351,10 +8351,10 @@
                               <a:alpha val="100000"/>
                             </a:srgbClr>
                           </a:solidFill>
-                          <a:latin typeface="DejaVu Sans"/>
-                          <a:cs typeface="DejaVu Sans"/>
-                          <a:ea typeface="DejaVu Sans"/>
-                          <a:sym typeface="DejaVu Sans"/>
+                          <a:latin typeface="Proxima Nova"/>
+                          <a:cs typeface="Proxima Nova"/>
+                          <a:ea typeface="Proxima Nova"/>
+                          <a:sym typeface="Proxima Nova"/>
                         </a:rPr>
                         <a:t>May</a:t>
                       </a:r>
@@ -8425,10 +8425,10 @@
                             <a:alpha val="100000"/>
                           </a:srgbClr>
                         </a:solidFill>
-                        <a:latin typeface="DejaVu Sans"/>
-                        <a:cs typeface="DejaVu Sans"/>
-                        <a:ea typeface="DejaVu Sans"/>
-                        <a:sym typeface="DejaVu Sans"/>
+                        <a:latin typeface="Proxima Nova"/>
+                        <a:cs typeface="Proxima Nova"/>
+                        <a:ea typeface="Proxima Nova"/>
+                        <a:sym typeface="Proxima Nova"/>
                       </a:endParaRPr>
                       <a:r>
                         <a:rPr cap="none" sz="1100" i="0" b="0" u="none" strike="noStrike">
@@ -8437,10 +8437,10 @@
                               <a:alpha val="100000"/>
                             </a:srgbClr>
                           </a:solidFill>
-                          <a:latin typeface="DejaVu Sans"/>
-                          <a:cs typeface="DejaVu Sans"/>
-                          <a:ea typeface="DejaVu Sans"/>
-                          <a:sym typeface="DejaVu Sans"/>
+                          <a:latin typeface="Proxima Nova"/>
+                          <a:cs typeface="Proxima Nova"/>
+                          <a:ea typeface="Proxima Nova"/>
+                          <a:sym typeface="Proxima Nova"/>
                         </a:rPr>
                         <a:t/>
                       </a:r>
@@ -8509,10 +8509,10 @@
                             <a:alpha val="100000"/>
                           </a:srgbClr>
                         </a:solidFill>
-                        <a:latin typeface="DejaVu Sans"/>
-                        <a:cs typeface="DejaVu Sans"/>
-                        <a:ea typeface="DejaVu Sans"/>
-                        <a:sym typeface="DejaVu Sans"/>
+                        <a:latin typeface="Proxima Nova"/>
+                        <a:cs typeface="Proxima Nova"/>
+                        <a:ea typeface="Proxima Nova"/>
+                        <a:sym typeface="Proxima Nova"/>
                       </a:endParaRPr>
                       <a:r>
                         <a:rPr cap="none" sz="1100" i="0" b="0" u="none" strike="noStrike">
@@ -8521,10 +8521,10 @@
                               <a:alpha val="100000"/>
                             </a:srgbClr>
                           </a:solidFill>
-                          <a:latin typeface="DejaVu Sans"/>
-                          <a:cs typeface="DejaVu Sans"/>
-                          <a:ea typeface="DejaVu Sans"/>
-                          <a:sym typeface="DejaVu Sans"/>
+                          <a:latin typeface="Proxima Nova"/>
+                          <a:cs typeface="Proxima Nova"/>
+                          <a:ea typeface="Proxima Nova"/>
+                          <a:sym typeface="Proxima Nova"/>
                         </a:rPr>
                         <a:t/>
                       </a:r>
@@ -8594,10 +8594,10 @@
                               <a:alpha val="100000"/>
                             </a:srgbClr>
                           </a:solidFill>
-                          <a:latin typeface="DejaVu Sans"/>
-                          <a:cs typeface="DejaVu Sans"/>
-                          <a:ea typeface="DejaVu Sans"/>
-                          <a:sym typeface="DejaVu Sans"/>
+                          <a:latin typeface="Proxima Nova"/>
+                          <a:cs typeface="Proxima Nova"/>
+                          <a:ea typeface="Proxima Nova"/>
+                          <a:sym typeface="Proxima Nova"/>
                         </a:rPr>
                         <a:t>14.3</a:t>
                       </a:r>
@@ -8667,10 +8667,10 @@
                               <a:alpha val="100000"/>
                             </a:srgbClr>
                           </a:solidFill>
-                          <a:latin typeface="DejaVu Sans"/>
-                          <a:cs typeface="DejaVu Sans"/>
-                          <a:ea typeface="DejaVu Sans"/>
-                          <a:sym typeface="DejaVu Sans"/>
+                          <a:latin typeface="Proxima Nova"/>
+                          <a:cs typeface="Proxima Nova"/>
+                          <a:ea typeface="Proxima Nova"/>
+                          <a:sym typeface="Proxima Nova"/>
                         </a:rPr>
                         <a:t>56</a:t>
                       </a:r>
@@ -8740,10 +8740,10 @@
                               <a:alpha val="100000"/>
                             </a:srgbClr>
                           </a:solidFill>
-                          <a:latin typeface="DejaVu Sans"/>
-                          <a:cs typeface="DejaVu Sans"/>
-                          <a:ea typeface="DejaVu Sans"/>
-                          <a:sym typeface="DejaVu Sans"/>
+                          <a:latin typeface="Proxima Nova"/>
+                          <a:cs typeface="Proxima Nova"/>
+                          <a:ea typeface="Proxima Nova"/>
+                          <a:sym typeface="Proxima Nova"/>
                         </a:rPr>
                         <a:t>5</a:t>
                       </a:r>
@@ -8813,10 +8813,10 @@
                               <a:alpha val="100000"/>
                             </a:srgbClr>
                           </a:solidFill>
-                          <a:latin typeface="DejaVu Sans"/>
-                          <a:cs typeface="DejaVu Sans"/>
-                          <a:ea typeface="DejaVu Sans"/>
-                          <a:sym typeface="DejaVu Sans"/>
+                          <a:latin typeface="Proxima Nova"/>
+                          <a:cs typeface="Proxima Nova"/>
+                          <a:ea typeface="Proxima Nova"/>
+                          <a:sym typeface="Proxima Nova"/>
                         </a:rPr>
                         <a:t>5</a:t>
                       </a:r>
@@ -8886,10 +8886,10 @@
                               <a:alpha val="100000"/>
                             </a:srgbClr>
                           </a:solidFill>
-                          <a:latin typeface="DejaVu Sans"/>
-                          <a:cs typeface="DejaVu Sans"/>
-                          <a:ea typeface="DejaVu Sans"/>
-                          <a:sym typeface="DejaVu Sans"/>
+                          <a:latin typeface="Proxima Nova"/>
+                          <a:cs typeface="Proxima Nova"/>
+                          <a:ea typeface="Proxima Nova"/>
+                          <a:sym typeface="Proxima Nova"/>
                         </a:rPr>
                         <a:t>May</a:t>
                       </a:r>
@@ -8961,10 +8961,10 @@
                               <a:alpha val="100000"/>
                             </a:srgbClr>
                           </a:solidFill>
-                          <a:latin typeface="DejaVu Sans"/>
-                          <a:cs typeface="DejaVu Sans"/>
-                          <a:ea typeface="DejaVu Sans"/>
-                          <a:sym typeface="DejaVu Sans"/>
+                          <a:latin typeface="Proxima Nova"/>
+                          <a:cs typeface="Proxima Nova"/>
+                          <a:ea typeface="Proxima Nova"/>
+                          <a:sym typeface="Proxima Nova"/>
                         </a:rPr>
                         <a:t>28</a:t>
                       </a:r>
@@ -9033,10 +9033,10 @@
                             <a:alpha val="100000"/>
                           </a:srgbClr>
                         </a:solidFill>
-                        <a:latin typeface="DejaVu Sans"/>
-                        <a:cs typeface="DejaVu Sans"/>
-                        <a:ea typeface="DejaVu Sans"/>
-                        <a:sym typeface="DejaVu Sans"/>
+                        <a:latin typeface="Proxima Nova"/>
+                        <a:cs typeface="Proxima Nova"/>
+                        <a:ea typeface="Proxima Nova"/>
+                        <a:sym typeface="Proxima Nova"/>
                       </a:endParaRPr>
                       <a:r>
                         <a:rPr cap="none" sz="1100" i="0" b="0" u="none" strike="noStrike">
@@ -9045,10 +9045,10 @@
                               <a:alpha val="100000"/>
                             </a:srgbClr>
                           </a:solidFill>
-                          <a:latin typeface="DejaVu Sans"/>
-                          <a:cs typeface="DejaVu Sans"/>
-                          <a:ea typeface="DejaVu Sans"/>
-                          <a:sym typeface="DejaVu Sans"/>
+                          <a:latin typeface="Proxima Nova"/>
+                          <a:cs typeface="Proxima Nova"/>
+                          <a:ea typeface="Proxima Nova"/>
+                          <a:sym typeface="Proxima Nova"/>
                         </a:rPr>
                         <a:t/>
                       </a:r>
@@ -9118,10 +9118,10 @@
                               <a:alpha val="100000"/>
                             </a:srgbClr>
                           </a:solidFill>
-                          <a:latin typeface="DejaVu Sans"/>
-                          <a:cs typeface="DejaVu Sans"/>
-                          <a:ea typeface="DejaVu Sans"/>
-                          <a:sym typeface="DejaVu Sans"/>
+                          <a:latin typeface="Proxima Nova"/>
+                          <a:cs typeface="Proxima Nova"/>
+                          <a:ea typeface="Proxima Nova"/>
+                          <a:sym typeface="Proxima Nova"/>
                         </a:rPr>
                         <a:t>14.9</a:t>
                       </a:r>
@@ -9191,10 +9191,10 @@
                               <a:alpha val="100000"/>
                             </a:srgbClr>
                           </a:solidFill>
-                          <a:latin typeface="DejaVu Sans"/>
-                          <a:cs typeface="DejaVu Sans"/>
-                          <a:ea typeface="DejaVu Sans"/>
-                          <a:sym typeface="DejaVu Sans"/>
+                          <a:latin typeface="Proxima Nova"/>
+                          <a:cs typeface="Proxima Nova"/>
+                          <a:ea typeface="Proxima Nova"/>
+                          <a:sym typeface="Proxima Nova"/>
                         </a:rPr>
                         <a:t>66</a:t>
                       </a:r>
@@ -9264,10 +9264,10 @@
                               <a:alpha val="100000"/>
                             </a:srgbClr>
                           </a:solidFill>
-                          <a:latin typeface="DejaVu Sans"/>
-                          <a:cs typeface="DejaVu Sans"/>
-                          <a:ea typeface="DejaVu Sans"/>
-                          <a:sym typeface="DejaVu Sans"/>
+                          <a:latin typeface="Proxima Nova"/>
+                          <a:cs typeface="Proxima Nova"/>
+                          <a:ea typeface="Proxima Nova"/>
+                          <a:sym typeface="Proxima Nova"/>
                         </a:rPr>
                         <a:t>5</a:t>
                       </a:r>
@@ -9337,10 +9337,10 @@
                               <a:alpha val="100000"/>
                             </a:srgbClr>
                           </a:solidFill>
-                          <a:latin typeface="DejaVu Sans"/>
-                          <a:cs typeface="DejaVu Sans"/>
-                          <a:ea typeface="DejaVu Sans"/>
-                          <a:sym typeface="DejaVu Sans"/>
+                          <a:latin typeface="Proxima Nova"/>
+                          <a:cs typeface="Proxima Nova"/>
+                          <a:ea typeface="Proxima Nova"/>
+                          <a:sym typeface="Proxima Nova"/>
                         </a:rPr>
                         <a:t>6</a:t>
                       </a:r>
@@ -9410,10 +9410,10 @@
                               <a:alpha val="100000"/>
                             </a:srgbClr>
                           </a:solidFill>
-                          <a:latin typeface="DejaVu Sans"/>
-                          <a:cs typeface="DejaVu Sans"/>
-                          <a:ea typeface="DejaVu Sans"/>
-                          <a:sym typeface="DejaVu Sans"/>
+                          <a:latin typeface="Proxima Nova"/>
+                          <a:cs typeface="Proxima Nova"/>
+                          <a:ea typeface="Proxima Nova"/>
+                          <a:sym typeface="Proxima Nova"/>
                         </a:rPr>
                         <a:t>May</a:t>
                       </a:r>
